--- a/works/1880China/1880China深度分析（341局）.pptx
+++ b/works/1880China/1880China深度分析（341局）.pptx
@@ -3283,7 +3283,7 @@
                 <a:ea typeface="Microsoft YaHei"/>
                 <a:cs typeface="Microsoft YaHei"/>
               </a:rPr>
-              <a:t>深度分析（341 局）· v1.2</a:t>
+              <a:t>深度分析（341 局）· v1.3</a:t>
             </a:r>
           </a:p>
         </p:txBody>
@@ -44905,7 +44905,7 @@
                 <a:ea typeface="Microsoft YaHei"/>
                 <a:cs typeface="Microsoft YaHei"/>
               </a:rPr>
-              <a:t>1880 China 深度分析（341 局）· v1.2</a:t>
+              <a:t>1880 China 深度分析（341 局）· v1.3</a:t>
             </a:r>
           </a:p>
         </p:txBody>
@@ -50287,7 +50287,7 @@
                 <a:ea typeface="Microsoft YaHei"/>
                 <a:cs typeface="Microsoft YaHei"/>
               </a:rPr>
-              <a:t>toddvp、cruizer、daroj…</a:t>
+              <a:t>玩家X…（按 BT 降序）</a:t>
             </a:r>
           </a:p>
         </p:txBody>
@@ -50466,7 +50466,7 @@
                 <a:ea typeface="Microsoft YaHei"/>
                 <a:cs typeface="Microsoft YaHei"/>
               </a:rPr>
-              <a:t>edhew、DrAwesome、Trigo…</a:t>
+              <a:t>玩家X…（按 BT 降序）</a:t>
             </a:r>
           </a:p>
         </p:txBody>
